--- a/assets/pptx/catalog-477.pptx
+++ b/assets/pptx/catalog-477.pptx
@@ -3371,7 +3371,7 @@
                 <a:ea typeface="Ebrima"/>
                 <a:cs typeface="Ebrima"/>
               </a:rPr>
-              <a:t>ምሥጋና ለስምህ ይሁን ምሥጋና ለስምህ (2x)</a:t>
+              <a:t>ምሥጋና ለስምህ ይሁን ምሥጋና ለስምህ 2x</a:t>
             </a:r>
           </a:p>
           <a:p>
@@ -3492,7 +3492,7 @@
                 <a:ea typeface="Ebrima"/>
                 <a:cs typeface="Ebrima"/>
               </a:rPr>
-              <a:t>በዙፋንህ ላይ ዘለዓለም ነዋሪ (2x)</a:t>
+              <a:t>በዙፋንህ ላይ ዘለዓለም ነዋሪ 2x</a:t>
             </a:r>
           </a:p>
           <a:p>
@@ -3528,7 +3528,7 @@
                 <a:ea typeface="Ebrima"/>
                 <a:cs typeface="Ebrima"/>
               </a:rPr>
-              <a:t>በዙፋንህ ላይ ዘለዓለም ነዋሪ (2x)</a:t>
+              <a:t>በዙፋንህ ላይ ዘለዓለም ነዋሪ 2x</a:t>
             </a:r>
           </a:p>
         </p:txBody>
@@ -3631,7 +3631,7 @@
                 <a:ea typeface="Ebrima"/>
                 <a:cs typeface="Ebrima"/>
               </a:rPr>
-              <a:t>አንተ ታላቅ ነህና አገለግልሃለሁ (2x)</a:t>
+              <a:t>አንተ ታላቅ ነህና አገለግልሃለሁ 2x</a:t>
             </a:r>
           </a:p>
         </p:txBody>
@@ -3698,7 +3698,7 @@
                 <a:ea typeface="Ebrima"/>
                 <a:cs typeface="Ebrima"/>
               </a:rPr>
-              <a:t>ታላቅ ነህ (5x)</a:t>
+              <a:t>ታላቅ ነህ 5x</a:t>
             </a:r>
           </a:p>
           <a:p>
@@ -3716,7 +3716,7 @@
                 <a:ea typeface="Ebrima"/>
                 <a:cs typeface="Ebrima"/>
               </a:rPr>
-              <a:t>ምሥጋና ለስምህ ይሁን (4x)</a:t>
+              <a:t>ምሥጋና ለስምህ ይሁን 4x</a:t>
             </a:r>
           </a:p>
           <a:p>
@@ -3940,7 +3940,7 @@
                 <a:ea typeface="Ebrima"/>
                 <a:cs typeface="Ebrima"/>
               </a:rPr>
-              <a:t>ምሥጋና ለስምህ ይሁን ምሥጋና ለስምህ (2x)</a:t>
+              <a:t>ምሥጋና ለስምህ ይሁን ምሥጋና ለስምህ 2x</a:t>
             </a:r>
           </a:p>
           <a:p>
@@ -4061,7 +4061,7 @@
                 <a:ea typeface="Ebrima"/>
                 <a:cs typeface="Ebrima"/>
               </a:rPr>
-              <a:t>በዙፋንህ ላይ ዘለዓለም ነዋሪ (2x)</a:t>
+              <a:t>በዙፋንህ ላይ ዘለዓለም ነዋሪ 2x</a:t>
             </a:r>
           </a:p>
           <a:p>
@@ -4097,7 +4097,7 @@
                 <a:ea typeface="Ebrima"/>
                 <a:cs typeface="Ebrima"/>
               </a:rPr>
-              <a:t>በዙፋንህ ላይ ዘለዓለም ነዋሪ (2x)</a:t>
+              <a:t>በዙፋንህ ላይ ዘለዓለም ነዋሪ 2x</a:t>
             </a:r>
           </a:p>
         </p:txBody>
@@ -4200,7 +4200,7 @@
                 <a:ea typeface="Ebrima"/>
                 <a:cs typeface="Ebrima"/>
               </a:rPr>
-              <a:t>አንተ ታላቅ ነህና አገለግልሃለሁ (2x)</a:t>
+              <a:t>አንተ ታላቅ ነህና አገለግልሃለሁ 2x</a:t>
             </a:r>
           </a:p>
         </p:txBody>
@@ -4267,7 +4267,7 @@
                 <a:ea typeface="Ebrima"/>
                 <a:cs typeface="Ebrima"/>
               </a:rPr>
-              <a:t>ታላቅ ነህ (5x)</a:t>
+              <a:t>ታላቅ ነህ 5x</a:t>
             </a:r>
           </a:p>
           <a:p>
@@ -4285,7 +4285,7 @@
                 <a:ea typeface="Ebrima"/>
                 <a:cs typeface="Ebrima"/>
               </a:rPr>
-              <a:t>ምሥጋና ለስምህ ይሁን (4x)</a:t>
+              <a:t>ምሥጋና ለስምህ ይሁን 4x</a:t>
             </a:r>
           </a:p>
           <a:p>
